--- a/docs/발표_CUSUM_판정식.pptx
+++ b/docs/발표_CUSUM_판정식.pptx
@@ -33138,8 +33138,47 @@
         </p:nvSpPr>
         <p:spPr>
           <a:xfrm>
-            <a:off x="502920" y="3749040"/>
-            <a:ext cx="11155680" cy="457200"/>
+            <a:off x="502920" y="3703320"/>
+            <a:ext cx="11155680" cy="237744"/>
+          </a:xfrm>
+          <a:prstGeom prst="rect">
+            <a:avLst/>
+          </a:prstGeom>
+          <a:noFill/>
+          <a:ln/>
+        </p:spPr>
+        <p:txBody>
+          <a:bodyPr wrap="square" lIns="0" tIns="0" rIns="0" bIns="0" rtlCol="0" anchor="ctr"/>
+          <a:lstStyle/>
+          <a:p>
+            <a:pPr indent="0" marL="0">
+              <a:buNone/>
+            </a:pPr>
+            <a:r>
+              <a:rPr lang="en-US" sz="1150" b="1" dirty="0">
+                <a:solidFill>
+                  <a:srgbClr val="1F3B57"/>
+                </a:solidFill>
+                <a:latin typeface="Arial" pitchFamily="34" charset="0"/>
+                <a:ea typeface="Arial" pitchFamily="34" charset="-122"/>
+                <a:cs typeface="Arial" pitchFamily="34" charset="-120"/>
+              </a:rPr>
+              <a:t>1,836이 어디서 나왔나 · 5,051이 어떻게 계산되나</a:t>
+            </a:r>
+            <a:endParaRPr lang="en-US" sz="1150" dirty="0"/>
+          </a:p>
+        </p:txBody>
+      </p:sp>
+      <p:sp>
+        <p:nvSpPr>
+          <p:cNvPr id="16" name="Text 13"/>
+          <p:cNvSpPr/>
+          <p:nvPr/>
+        </p:nvSpPr>
+        <p:spPr>
+          <a:xfrm>
+            <a:off x="502920" y="3977640"/>
+            <a:ext cx="11155680" cy="566928"/>
           </a:xfrm>
           <a:prstGeom prst="rect">
             <a:avLst/>
@@ -33152,33 +33191,56 @@
           <a:lstStyle/>
           <a:p>
             <a:pPr indent="0" marL="0">
+              <a:lnSpc>
+                <a:spcPts val="1900"/>
+              </a:lnSpc>
               <a:buNone/>
             </a:pPr>
             <a:r>
-              <a:rPr lang="en-US" sz="900" dirty="0">
+              <a:rPr lang="en-US" sz="1150" dirty="0">
                 <a:solidFill>
-                  <a:srgbClr val="8494A5"/>
+                  <a:srgbClr val="1F3B57"/>
                 </a:solidFill>
                 <a:latin typeface="Arial" pitchFamily="34" charset="0"/>
                 <a:ea typeface="Arial" pitchFamily="34" charset="-122"/>
                 <a:cs typeface="Arial" pitchFamily="34" charset="-120"/>
               </a:rPr>
-              <a:t>장비당 54개 Product×Recipe 그룹 × 34개 컬럼 = 1,836개.  그룹당 5.19샷/일.  몬테카를로 2만 회 — 교과서값에서 169가 나와 문헌값 ~168과 맞는다.</a:t>
+              <a:t>제품 6종 × 레시피 9종 = 54개 조합.  거기에 감시 컬럼 34개 → 장비 1대에 CUSUM 1,836개가 동시에 돈다.</a:t>
             </a:r>
-            <a:endParaRPr lang="en-US" sz="900" dirty="0"/>
+            <a:endParaRPr lang="en-US" sz="1150" dirty="0"/>
+          </a:p>
+          <a:p>
+            <a:pPr indent="0" marL="0">
+              <a:lnSpc>
+                <a:spcPts val="1900"/>
+              </a:lnSpc>
+              <a:buNone/>
+            </a:pPr>
+            <a:r>
+              <a:rPr lang="en-US" sz="1150" b="1" dirty="0">
+                <a:solidFill>
+                  <a:srgbClr val="C2372C"/>
+                </a:solidFill>
+                <a:latin typeface="Arial" pitchFamily="34" charset="0"/>
+                <a:ea typeface="Arial" pitchFamily="34" charset="-122"/>
+                <a:cs typeface="Arial" pitchFamily="34" charset="-120"/>
+              </a:rPr>
+              <a:t>그룹 하나에 하루 5.19샷 →  169샷 ÷ 5.19 = 32.5일  →  1,836개 ÷ 32.5일 = 하루 56건  →  89일이면 5,051건.</a:t>
+            </a:r>
+            <a:endParaRPr lang="en-US" sz="1150" dirty="0"/>
           </a:p>
         </p:txBody>
       </p:sp>
       <p:sp>
         <p:nvSpPr>
-          <p:cNvPr id="16" name="Shape 13"/>
+          <p:cNvPr id="17" name="Shape 14"/>
           <p:cNvSpPr/>
           <p:nvPr/>
         </p:nvSpPr>
         <p:spPr>
           <a:xfrm>
-            <a:off x="502920" y="4224528"/>
-            <a:ext cx="3566160" cy="1417320"/>
+            <a:off x="502920" y="4681728"/>
+            <a:ext cx="3566160" cy="1261872"/>
           </a:xfrm>
           <a:prstGeom prst="rect">
             <a:avLst/>
@@ -33196,13 +33258,13 @@
       </p:sp>
       <p:sp>
         <p:nvSpPr>
-          <p:cNvPr id="17" name="Text 14"/>
+          <p:cNvPr id="18" name="Text 15"/>
           <p:cNvSpPr/>
           <p:nvPr/>
         </p:nvSpPr>
         <p:spPr>
           <a:xfrm>
-            <a:off x="685800" y="4315968"/>
+            <a:off x="685800" y="4773168"/>
             <a:ext cx="3200400" cy="530352"/>
           </a:xfrm>
           <a:prstGeom prst="rect">
@@ -33219,7 +33281,149 @@
               <a:buNone/>
             </a:pPr>
             <a:r>
-              <a:rPr lang="en-US" sz="3200" b="1" dirty="0">
+              <a:rPr lang="en-US" sz="2400" b="1" dirty="0">
+                <a:solidFill>
+                  <a:srgbClr val="15654A"/>
+                </a:solidFill>
+                <a:latin typeface="Arial" pitchFamily="34" charset="0"/>
+                <a:ea typeface="Arial" pitchFamily="34" charset="-122"/>
+                <a:cs typeface="Arial" pitchFamily="34" charset="-120"/>
+              </a:rPr>
+              <a:t>169 vs 168</a:t>
+            </a:r>
+            <a:endParaRPr lang="en-US" sz="2400" dirty="0"/>
+          </a:p>
+        </p:txBody>
+      </p:sp>
+      <p:sp>
+        <p:nvSpPr>
+          <p:cNvPr id="19" name="Text 16"/>
+          <p:cNvSpPr/>
+          <p:nvPr/>
+        </p:nvSpPr>
+        <p:spPr>
+          <a:xfrm>
+            <a:off x="685800" y="5303520"/>
+            <a:ext cx="3200400" cy="219456"/>
+          </a:xfrm>
+          <a:prstGeom prst="rect">
+            <a:avLst/>
+          </a:prstGeom>
+          <a:noFill/>
+          <a:ln/>
+        </p:spPr>
+        <p:txBody>
+          <a:bodyPr wrap="square" lIns="0" tIns="0" rIns="0" bIns="0" rtlCol="0" anchor="ctr"/>
+          <a:lstStyle/>
+          <a:p>
+            <a:pPr algn="l" indent="0" marL="0">
+              <a:buNone/>
+            </a:pPr>
+            <a:r>
+              <a:rPr lang="en-US" sz="1100" b="1" dirty="0">
+                <a:solidFill>
+                  <a:srgbClr val="1F3B57"/>
+                </a:solidFill>
+                <a:latin typeface="Arial" pitchFamily="34" charset="0"/>
+                <a:ea typeface="Arial" pitchFamily="34" charset="-122"/>
+                <a:cs typeface="Arial" pitchFamily="34" charset="-120"/>
+              </a:rPr>
+              <a:t>시뮬레이터 자체 점검</a:t>
+            </a:r>
+            <a:endParaRPr lang="en-US" sz="1100" dirty="0"/>
+          </a:p>
+        </p:txBody>
+      </p:sp>
+      <p:sp>
+        <p:nvSpPr>
+          <p:cNvPr id="20" name="Text 17"/>
+          <p:cNvSpPr/>
+          <p:nvPr/>
+        </p:nvSpPr>
+        <p:spPr>
+          <a:xfrm>
+            <a:off x="685800" y="5522976"/>
+            <a:ext cx="3200400" cy="347472"/>
+          </a:xfrm>
+          <a:prstGeom prst="rect">
+            <a:avLst/>
+          </a:prstGeom>
+          <a:noFill/>
+          <a:ln/>
+        </p:spPr>
+        <p:txBody>
+          <a:bodyPr wrap="square" lIns="0" tIns="0" rIns="0" bIns="0" rtlCol="0" anchor="t"/>
+          <a:lstStyle/>
+          <a:p>
+            <a:pPr algn="l" indent="0" marL="0">
+              <a:buNone/>
+            </a:pPr>
+            <a:r>
+              <a:rPr lang="en-US" sz="950" dirty="0">
+                <a:solidFill>
+                  <a:srgbClr val="8494A5"/>
+                </a:solidFill>
+                <a:latin typeface="Arial" pitchFamily="34" charset="0"/>
+                <a:ea typeface="Arial" pitchFamily="34" charset="-122"/>
+                <a:cs typeface="Arial" pitchFamily="34" charset="-120"/>
+              </a:rPr>
+              <a:t>ARL 공식이 없어 난수로 2만 번 재는데, 답이 알려진 교과서 설정에서 문헌값과 맞았다.</a:t>
+            </a:r>
+            <a:endParaRPr lang="en-US" sz="950" dirty="0"/>
+          </a:p>
+        </p:txBody>
+      </p:sp>
+      <p:sp>
+        <p:nvSpPr>
+          <p:cNvPr id="21" name="Shape 18"/>
+          <p:cNvSpPr/>
+          <p:nvPr/>
+        </p:nvSpPr>
+        <p:spPr>
+          <a:xfrm>
+            <a:off x="4297680" y="4681728"/>
+            <a:ext cx="3566160" cy="1261872"/>
+          </a:xfrm>
+          <a:prstGeom prst="rect">
+            <a:avLst/>
+          </a:prstGeom>
+          <a:solidFill>
+            <a:srgbClr val="F2F5F8"/>
+          </a:solidFill>
+          <a:ln w="12700">
+            <a:solidFill>
+              <a:srgbClr val="F2F5F8"/>
+            </a:solidFill>
+            <a:prstDash val="solid"/>
+          </a:ln>
+        </p:spPr>
+      </p:sp>
+      <p:sp>
+        <p:nvSpPr>
+          <p:cNvPr id="22" name="Text 19"/>
+          <p:cNvSpPr/>
+          <p:nvPr/>
+        </p:nvSpPr>
+        <p:spPr>
+          <a:xfrm>
+            <a:off x="4480560" y="4773168"/>
+            <a:ext cx="3200400" cy="530352"/>
+          </a:xfrm>
+          <a:prstGeom prst="rect">
+            <a:avLst/>
+          </a:prstGeom>
+          <a:noFill/>
+          <a:ln/>
+        </p:spPr>
+        <p:txBody>
+          <a:bodyPr wrap="square" lIns="0" tIns="0" rIns="0" bIns="0" rtlCol="0" anchor="ctr"/>
+          <a:lstStyle/>
+          <a:p>
+            <a:pPr algn="l" indent="0" marL="0">
+              <a:buNone/>
+            </a:pPr>
+            <a:r>
+              <a:rPr lang="en-US" sz="2400" b="1" dirty="0">
                 <a:solidFill>
                   <a:srgbClr val="15654A"/>
                 </a:solidFill>
@@ -33229,19 +33433,19 @@
               </a:rPr>
               <a:t>608 vs 665</a:t>
             </a:r>
-            <a:endParaRPr lang="en-US" sz="3200" dirty="0"/>
+            <a:endParaRPr lang="en-US" sz="2400" dirty="0"/>
           </a:p>
         </p:txBody>
       </p:sp>
       <p:sp>
         <p:nvSpPr>
-          <p:cNvPr id="18" name="Text 15"/>
+          <p:cNvPr id="23" name="Text 20"/>
           <p:cNvSpPr/>
           <p:nvPr/>
         </p:nvSpPr>
         <p:spPr>
           <a:xfrm>
-            <a:off x="685800" y="4846320"/>
+            <a:off x="4480560" y="5303520"/>
             <a:ext cx="3200400" cy="219456"/>
           </a:xfrm>
           <a:prstGeom prst="rect">
@@ -33274,14 +33478,14 @@
       </p:sp>
       <p:sp>
         <p:nvSpPr>
-          <p:cNvPr id="19" name="Text 16"/>
+          <p:cNvPr id="24" name="Text 21"/>
           <p:cNvSpPr/>
           <p:nvPr/>
         </p:nvSpPr>
         <p:spPr>
           <a:xfrm>
-            <a:off x="685800" y="5065776"/>
-            <a:ext cx="3200400" cy="502920"/>
+            <a:off x="4480560" y="5522976"/>
+            <a:ext cx="3200400" cy="347472"/>
           </a:xfrm>
           <a:prstGeom prst="rect">
             <a:avLst/>
@@ -33313,14 +33517,14 @@
       </p:sp>
       <p:sp>
         <p:nvSpPr>
-          <p:cNvPr id="20" name="Shape 17"/>
+          <p:cNvPr id="25" name="Shape 22"/>
           <p:cNvSpPr/>
           <p:nvPr/>
         </p:nvSpPr>
         <p:spPr>
           <a:xfrm>
-            <a:off x="4297680" y="4224528"/>
-            <a:ext cx="3566160" cy="1417320"/>
+            <a:off x="8092440" y="4681728"/>
+            <a:ext cx="3566160" cy="1261872"/>
           </a:xfrm>
           <a:prstGeom prst="rect">
             <a:avLst/>
@@ -33338,13 +33542,13 @@
       </p:sp>
       <p:sp>
         <p:nvSpPr>
-          <p:cNvPr id="21" name="Text 18"/>
+          <p:cNvPr id="26" name="Text 23"/>
           <p:cNvSpPr/>
           <p:nvPr/>
         </p:nvSpPr>
         <p:spPr>
           <a:xfrm>
-            <a:off x="4480560" y="4315968"/>
+            <a:off x="8275320" y="4773168"/>
             <a:ext cx="3200400" cy="530352"/>
           </a:xfrm>
           <a:prstGeom prst="rect">
@@ -33361,149 +33565,7 @@
               <a:buNone/>
             </a:pPr>
             <a:r>
-              <a:rPr lang="en-US" sz="3200" b="1" dirty="0">
-                <a:solidFill>
-                  <a:srgbClr val="C2372C"/>
-                </a:solidFill>
-                <a:latin typeface="Arial" pitchFamily="34" charset="0"/>
-                <a:ea typeface="Arial" pitchFamily="34" charset="-122"/>
-                <a:cs typeface="Arial" pitchFamily="34" charset="-120"/>
-              </a:rPr>
-              <a:t>0.351σ</a:t>
-            </a:r>
-            <a:endParaRPr lang="en-US" sz="3200" dirty="0"/>
-          </a:p>
-        </p:txBody>
-      </p:sp>
-      <p:sp>
-        <p:nvSpPr>
-          <p:cNvPr id="22" name="Text 19"/>
-          <p:cNvSpPr/>
-          <p:nvPr/>
-        </p:nvSpPr>
-        <p:spPr>
-          <a:xfrm>
-            <a:off x="4480560" y="4846320"/>
-            <a:ext cx="3200400" cy="219456"/>
-          </a:xfrm>
-          <a:prstGeom prst="rect">
-            <a:avLst/>
-          </a:prstGeom>
-          <a:noFill/>
-          <a:ln/>
-        </p:spPr>
-        <p:txBody>
-          <a:bodyPr wrap="square" lIns="0" tIns="0" rIns="0" bIns="0" rtlCol="0" anchor="ctr"/>
-          <a:lstStyle/>
-          <a:p>
-            <a:pPr algn="l" indent="0" marL="0">
-              <a:buNone/>
-            </a:pPr>
-            <a:r>
-              <a:rPr lang="en-US" sz="1100" b="1" dirty="0">
-                <a:solidFill>
-                  <a:srgbClr val="1F3B57"/>
-                </a:solidFill>
-                <a:latin typeface="Arial" pitchFamily="34" charset="0"/>
-                <a:ea typeface="Arial" pitchFamily="34" charset="-122"/>
-                <a:cs typeface="Arial" pitchFamily="34" charset="-120"/>
-              </a:rPr>
-              <a:t>DP01 최대 상시 오프셋</a:t>
-            </a:r>
-            <a:endParaRPr lang="en-US" sz="1100" dirty="0"/>
-          </a:p>
-        </p:txBody>
-      </p:sp>
-      <p:sp>
-        <p:nvSpPr>
-          <p:cNvPr id="23" name="Text 20"/>
-          <p:cNvSpPr/>
-          <p:nvPr/>
-        </p:nvSpPr>
-        <p:spPr>
-          <a:xfrm>
-            <a:off x="4480560" y="5065776"/>
-            <a:ext cx="3200400" cy="502920"/>
-          </a:xfrm>
-          <a:prstGeom prst="rect">
-            <a:avLst/>
-          </a:prstGeom>
-          <a:noFill/>
-          <a:ln/>
-        </p:spPr>
-        <p:txBody>
-          <a:bodyPr wrap="square" lIns="0" tIns="0" rIns="0" bIns="0" rtlCol="0" anchor="t"/>
-          <a:lstStyle/>
-          <a:p>
-            <a:pPr algn="l" indent="0" marL="0">
-              <a:buNone/>
-            </a:pPr>
-            <a:r>
-              <a:rPr lang="en-US" sz="950" dirty="0">
-                <a:solidFill>
-                  <a:srgbClr val="8494A5"/>
-                </a:solidFill>
-                <a:latin typeface="Arial" pitchFamily="34" charset="0"/>
-                <a:ea typeface="Arial" pitchFamily="34" charset="-122"/>
-                <a:cs typeface="Arial" pitchFamily="34" charset="-120"/>
-              </a:rPr>
-              <a:t>baseline이 OPCOND 공통이라 남는다. ARL₀가 아니라 ARL₁로 들어온다.</a:t>
-            </a:r>
-            <a:endParaRPr lang="en-US" sz="950" dirty="0"/>
-          </a:p>
-        </p:txBody>
-      </p:sp>
-      <p:sp>
-        <p:nvSpPr>
-          <p:cNvPr id="24" name="Shape 21"/>
-          <p:cNvSpPr/>
-          <p:nvPr/>
-        </p:nvSpPr>
-        <p:spPr>
-          <a:xfrm>
-            <a:off x="8092440" y="4224528"/>
-            <a:ext cx="3566160" cy="1417320"/>
-          </a:xfrm>
-          <a:prstGeom prst="rect">
-            <a:avLst/>
-          </a:prstGeom>
-          <a:solidFill>
-            <a:srgbClr val="F2F5F8"/>
-          </a:solidFill>
-          <a:ln w="12700">
-            <a:solidFill>
-              <a:srgbClr val="F2F5F8"/>
-            </a:solidFill>
-            <a:prstDash val="solid"/>
-          </a:ln>
-        </p:spPr>
-      </p:sp>
-      <p:sp>
-        <p:nvSpPr>
-          <p:cNvPr id="25" name="Text 22"/>
-          <p:cNvSpPr/>
-          <p:nvPr/>
-        </p:nvSpPr>
-        <p:spPr>
-          <a:xfrm>
-            <a:off x="8275320" y="4315968"/>
-            <a:ext cx="3200400" cy="530352"/>
-          </a:xfrm>
-          <a:prstGeom prst="rect">
-            <a:avLst/>
-          </a:prstGeom>
-          <a:noFill/>
-          <a:ln/>
-        </p:spPr>
-        <p:txBody>
-          <a:bodyPr wrap="square" lIns="0" tIns="0" rIns="0" bIns="0" rtlCol="0" anchor="ctr"/>
-          <a:lstStyle/>
-          <a:p>
-            <a:pPr algn="l" indent="0" marL="0">
-              <a:buNone/>
-            </a:pPr>
-            <a:r>
-              <a:rPr lang="en-US" sz="3200" b="1" dirty="0">
+              <a:rPr lang="en-US" sz="2400" b="1" dirty="0">
                 <a:solidFill>
                   <a:srgbClr val="C2372C"/>
                 </a:solidFill>
@@ -33513,19 +33575,19 @@
               </a:rPr>
               <a:t>k ≈ 0.29</a:t>
             </a:r>
-            <a:endParaRPr lang="en-US" sz="3200" dirty="0"/>
+            <a:endParaRPr lang="en-US" sz="2400" dirty="0"/>
           </a:p>
         </p:txBody>
       </p:sp>
       <p:sp>
         <p:nvSpPr>
-          <p:cNvPr id="26" name="Text 23"/>
+          <p:cNvPr id="27" name="Text 24"/>
           <p:cNvSpPr/>
           <p:nvPr/>
         </p:nvSpPr>
         <p:spPr>
           <a:xfrm>
-            <a:off x="8275320" y="4846320"/>
+            <a:off x="8275320" y="5303520"/>
             <a:ext cx="3200400" cy="219456"/>
           </a:xfrm>
           <a:prstGeom prst="rect">
@@ -33558,14 +33620,14 @@
       </p:sp>
       <p:sp>
         <p:nvSpPr>
-          <p:cNvPr id="27" name="Text 24"/>
+          <p:cNvPr id="28" name="Text 25"/>
           <p:cNvSpPr/>
           <p:nvPr/>
         </p:nvSpPr>
         <p:spPr>
           <a:xfrm>
-            <a:off x="8275320" y="5065776"/>
-            <a:ext cx="3200400" cy="502920"/>
+            <a:off x="8275320" y="5522976"/>
+            <a:ext cx="3200400" cy="347472"/>
           </a:xfrm>
           <a:prstGeom prst="rect">
             <a:avLst/>
@@ -33589,7 +33651,7 @@
                 <a:ea typeface="Arial" pitchFamily="34" charset="-122"/>
                 <a:cs typeface="Arial" pitchFamily="34" charset="-120"/>
               </a:rPr>
-              <a:t>0.57σ 열화 기준. 교과서 0.5보다 더 민감하게 가라고 나온다.</a:t>
+              <a:t>0.57σ 열화 기준. 교과서 0.5보다 더 민감하게 가라고 나온다 — 반대 방향이다.</a:t>
             </a:r>
             <a:endParaRPr lang="en-US" sz="950" dirty="0"/>
           </a:p>
@@ -33597,7 +33659,7 @@
       </p:sp>
       <p:sp>
         <p:nvSpPr>
-          <p:cNvPr id="28" name="Shape 25"/>
+          <p:cNvPr id="29" name="Shape 26"/>
           <p:cNvSpPr/>
           <p:nvPr/>
         </p:nvSpPr>
@@ -33622,7 +33684,7 @@
       </p:sp>
       <p:sp>
         <p:nvSpPr>
-          <p:cNvPr id="29" name="Text 26"/>
+          <p:cNvPr id="30" name="Text 27"/>
           <p:cNvSpPr/>
           <p:nvPr/>
         </p:nvSpPr>
